--- a/assessments/HS-LS1-1/slides/Day_1_Launch_with_the_Siamese_cat.pptx
+++ b/assessments/HS-LS1-1/slides/Day_1_Launch_with_the_Siamese_cat.pptx
@@ -3161,14 +3161,14 @@
           <a:lstStyle/>
           <a:p>
             <a:pPr>
-              <a:defRPr sz="2600" b="1">
+              <a:defRPr sz="3000" b="1">
                 <a:solidFill>
                   <a:srgbClr val="FFFFFF"/>
                 </a:solidFill>
               </a:defRPr>
             </a:pPr>
             <a:r>
-              <a:t>Day 1: Why are a Siamese cat's ears, paws, and tail dark?</a:t>
+              <a:t>Day 1: The Siamese cat mystery</a:t>
             </a:r>
           </a:p>
         </p:txBody>

--- a/assessments/HS-LS1-1/slides/Day_1_Launch_with_the_Siamese_cat.pptx
+++ b/assessments/HS-LS1-1/slides/Day_1_Launch_with_the_Siamese_cat.pptx
@@ -3221,7 +3221,7 @@
               </a:defRPr>
             </a:pPr>
             <a:r>
-              <a:t>• Today's target: DNA holds the instructions for building proteins (LS1-1.2)</a:t>
+              <a:t>• Today's target: DNA holds the instructions for building proteins (LS1-1.1)</a:t>
             </a:r>
           </a:p>
         </p:txBody>
@@ -6105,7 +6105,7 @@
               </a:defRPr>
             </a:pPr>
             <a:r>
-              <a:t>Exit ticket: CFA LS1-1.2</a:t>
+              <a:t>Before you leave</a:t>
             </a:r>
           </a:p>
         </p:txBody>
@@ -6143,7 +6143,7 @@
               </a:defRPr>
             </a:pPr>
             <a:r>
-              <a:t>• 6 minutes, on your own.</a:t>
+              <a:t>• Write one thing you learned today and one question you still have.</a:t>
             </a:r>
           </a:p>
           <a:p>
